--- a/docs/Camel-入门指南.pptx
+++ b/docs/Camel-入门指南.pptx
@@ -3322,7 +3322,7 @@
                 </a:solidFill>
                 <a:latin typeface="Menlo"/>
               </a:rPr>
-              <a:t>Spring Boot  3.5.14      Spring Cloud  2025.0.2</a:t>
+              <a:t>Spring Boot  4.1.1       Spring Cloud  2025.1.3</a:t>
             </a:r>
           </a:p>
           <a:p>
@@ -3341,7 +3341,7 @@
                 </a:solidFill>
                 <a:latin typeface="Menlo"/>
               </a:rPr>
-              <a:t>Camel        4.18.2      JDK           21</a:t>
+              <a:t>Camel        4.22.1      JDK           21</a:t>
             </a:r>
           </a:p>
           <a:p>
@@ -7625,7 +7625,7 @@
                 </a:solidFill>
                 <a:latin typeface="PingFang SC"/>
               </a:rPr>
-              <a:t>API-3　ProducerTemplate：从路由外面发消息</a:t>
+              <a:t>API-3　ProducerTemplate + Freemarker 报文转换</a:t>
             </a:r>
           </a:p>
         </p:txBody>
@@ -7667,7 +7667,7 @@
                 </a:solidFill>
                 <a:latin typeface="PingFang SC"/>
               </a:rPr>
-              <a:t>POST /api/v1/orders/quote —— 调远程 HTTP，也调本地路由</a:t>
+              <a:t>POST /api/v1/orders/quote —— 出入站各过一次模板，把外部系统的方言挡在门外</a:t>
             </a:r>
           </a:p>
         </p:txBody>
@@ -7725,7 +7725,7 @@
         <p:spPr>
           <a:xfrm>
             <a:off x="658368" y="1755648"/>
-            <a:ext cx="6858000" cy="3003803"/>
+            <a:ext cx="6858000" cy="3451859"/>
           </a:xfrm>
           <a:prstGeom prst="roundRect">
             <a:avLst>
@@ -7801,7 +7801,7 @@
                 </a:solidFill>
                 <a:latin typeface="PingFang SC"/>
               </a:rPr>
-              <a:t>bean/RemoteCallService.java</a:t>
+              <a:t>bean/RemoteCallService.java —— 四步都是同一个 ProducerTemplate</a:t>
             </a:r>
           </a:p>
         </p:txBody>
@@ -7815,7 +7815,7 @@
         <p:spPr>
           <a:xfrm>
             <a:off x="896112" y="2194560"/>
-            <a:ext cx="6400800" cy="2638044"/>
+            <a:ext cx="6400800" cy="3086099"/>
           </a:xfrm>
           <a:prstGeom prst="rect">
             <a:avLst/>
@@ -7843,7 +7843,7 @@
                 </a:solidFill>
                 <a:latin typeface="Menlo"/>
               </a:rPr>
-              <a:t>// 用法 1：调用远程 HTTP API</a:t>
+              <a:t>// ① request.ftl：内部订单 -&gt; 外部系统的报文格式</a:t>
             </a:r>
           </a:p>
           <a:p>
@@ -7862,7 +7862,7 @@
                 </a:solidFill>
                 <a:latin typeface="Menlo"/>
               </a:rPr>
-              <a:t>String raw = producerTemplate.requestBodyAndHeaders(</a:t>
+              <a:t>String outbound = template.requestBodyAndHeader(</a:t>
             </a:r>
           </a:p>
           <a:p>
@@ -7881,7 +7881,7 @@
                 </a:solidFill>
                 <a:latin typeface="Menlo"/>
               </a:rPr>
-              <a:t>        "http://localhost:8080/mock/remote/fx-rate?bridgeEndpoint=true",</a:t>
+              <a:t>        "freemarker:templates/request.ftl", request, "msgId", msgId, String.class);</a:t>
             </a:r>
           </a:p>
           <a:p>
@@ -7900,7 +7900,7 @@
                 </a:solidFill>
                 <a:latin typeface="Menlo"/>
               </a:rPr>
-              <a:t>        json,</a:t>
+              <a:t/>
             </a:r>
           </a:p>
           <a:p>
@@ -7919,7 +7919,7 @@
                 </a:solidFill>
                 <a:latin typeface="Menlo"/>
               </a:rPr>
-              <a:t>        Map.of(Exchange.HTTP_METHOD, "POST",</a:t>
+              <a:t>// ② ProducerTemplate 发起真实 HTTP 调用</a:t>
             </a:r>
           </a:p>
           <a:p>
@@ -7938,7 +7938,7 @@
                 </a:solidFill>
                 <a:latin typeface="Menlo"/>
               </a:rPr>
-              <a:t>               Exchange.CONTENT_TYPE, "application/json"),</a:t>
+              <a:t>String raw = template.requestBodyAndHeaders(</a:t>
             </a:r>
           </a:p>
           <a:p>
@@ -7957,7 +7957,7 @@
                 </a:solidFill>
                 <a:latin typeface="Menlo"/>
               </a:rPr>
-              <a:t>        String.class);</a:t>
+              <a:t>        "http://.../fx-rate?bridgeEndpoint=true", outbound,</a:t>
             </a:r>
           </a:p>
           <a:p>
@@ -7976,6 +7976,25 @@
                 </a:solidFill>
                 <a:latin typeface="Menlo"/>
               </a:rPr>
+              <a:t>        Map.of(Exchange.HTTP_METHOD, "POST"), String.class);</a:t>
+            </a:r>
+          </a:p>
+          <a:p>
+            <a:pPr algn="l">
+              <a:lnSpc>
+                <a:spcPct val="112000"/>
+              </a:lnSpc>
+              <a:spcAft>
+                <a:spcPts val="0"/>
+              </a:spcAft>
+            </a:pPr>
+            <a:r>
+              <a:rPr sz="1050" b="0">
+                <a:solidFill>
+                  <a:srgbClr val="E2E8F0"/>
+                </a:solidFill>
+                <a:latin typeface="Menlo"/>
+              </a:rPr>
               <a:t/>
             </a:r>
           </a:p>
@@ -7995,7 +8014,7 @@
                 </a:solidFill>
                 <a:latin typeface="Menlo"/>
               </a:rPr>
-              <a:t>// 用法 2：回调本地 Camel 路由（direct: 同步、同线程）</a:t>
+              <a:t>// ③ response.ftl：外部应答 -&gt; 本应用的业务格式</a:t>
             </a:r>
           </a:p>
           <a:p>
@@ -8014,7 +8033,7 @@
                 </a:solidFill>
                 <a:latin typeface="Menlo"/>
               </a:rPr>
-              <a:t>Map&lt;String,Object&gt; fee = producerTemplate.requestBody(</a:t>
+              <a:t>String business = template.requestBody(</a:t>
             </a:r>
           </a:p>
           <a:p>
@@ -8033,7 +8052,64 @@
                 </a:solidFill>
                 <a:latin typeface="Menlo"/>
               </a:rPr>
-              <a:t>        "direct:api3-calc-fee", request, Map.class);</a:t>
+              <a:t>        "freemarker:templates/response.ftl", parse(raw), String.class);</a:t>
+            </a:r>
+          </a:p>
+          <a:p>
+            <a:pPr algn="l">
+              <a:lnSpc>
+                <a:spcPct val="112000"/>
+              </a:lnSpc>
+              <a:spcAft>
+                <a:spcPts val="0"/>
+              </a:spcAft>
+            </a:pPr>
+            <a:r>
+              <a:rPr sz="1050" b="0">
+                <a:solidFill>
+                  <a:srgbClr val="E2E8F0"/>
+                </a:solidFill>
+                <a:latin typeface="Menlo"/>
+              </a:rPr>
+              <a:t/>
+            </a:r>
+          </a:p>
+          <a:p>
+            <a:pPr algn="l">
+              <a:lnSpc>
+                <a:spcPct val="112000"/>
+              </a:lnSpc>
+              <a:spcAft>
+                <a:spcPts val="0"/>
+              </a:spcAft>
+            </a:pPr>
+            <a:r>
+              <a:rPr sz="1050" b="0">
+                <a:solidFill>
+                  <a:srgbClr val="E2E8F0"/>
+                </a:solidFill>
+                <a:latin typeface="Menlo"/>
+              </a:rPr>
+              <a:t>// ④ 回调本地 Camel 路由（direct: 同步、同线程）</a:t>
+            </a:r>
+          </a:p>
+          <a:p>
+            <a:pPr algn="l">
+              <a:lnSpc>
+                <a:spcPct val="112000"/>
+              </a:lnSpc>
+              <a:spcAft>
+                <a:spcPts val="0"/>
+              </a:spcAft>
+            </a:pPr>
+            <a:r>
+              <a:rPr sz="1050" b="0">
+                <a:solidFill>
+                  <a:srgbClr val="E2E8F0"/>
+                </a:solidFill>
+                <a:latin typeface="Menlo"/>
+              </a:rPr>
+              <a:t>Map&lt;String,Object&gt; fee = template.requestBody("direct:api3-calc-fee", request);</a:t>
             </a:r>
           </a:p>
         </p:txBody>
@@ -8174,7 +8250,7 @@
         </p:nvSpPr>
         <p:spPr>
           <a:xfrm>
-            <a:off x="7699248" y="2798064"/>
+            <a:off x="7699248" y="2779776"/>
             <a:ext cx="91440" cy="91440"/>
           </a:xfrm>
           <a:prstGeom prst="ellipse">
@@ -8218,7 +8294,7 @@
         </p:nvSpPr>
         <p:spPr>
           <a:xfrm>
-            <a:off x="7936992" y="2724912"/>
+            <a:off x="7936992" y="2706624"/>
             <a:ext cx="3694176" cy="256032"/>
           </a:xfrm>
           <a:prstGeom prst="rect">
@@ -8247,7 +8323,7 @@
                 </a:solidFill>
                 <a:latin typeface="PingFang SC"/>
               </a:rPr>
-              <a:t>sendBody(...)</a:t>
+              <a:t>requestBody(...)</a:t>
             </a:r>
           </a:p>
         </p:txBody>
@@ -8260,7 +8336,7 @@
         </p:nvSpPr>
         <p:spPr>
           <a:xfrm>
-            <a:off x="7936992" y="2980944"/>
+            <a:off x="7936992" y="2962656"/>
             <a:ext cx="3694176" cy="256032"/>
           </a:xfrm>
           <a:prstGeom prst="rect">
@@ -8289,7 +8365,7 @@
                 </a:solidFill>
                 <a:latin typeface="PingFang SC"/>
               </a:rPr>
-              <a:t>InOnly：发了就走，不等返回</a:t>
+              <a:t>InOut：等待并返回结果；sendBody 不等</a:t>
             </a:r>
           </a:p>
         </p:txBody>
@@ -8302,7 +8378,7 @@
         </p:nvSpPr>
         <p:spPr>
           <a:xfrm>
-            <a:off x="7699248" y="3451860"/>
+            <a:off x="7699248" y="3415284"/>
             <a:ext cx="91440" cy="91440"/>
           </a:xfrm>
           <a:prstGeom prst="ellipse">
@@ -8346,7 +8422,7 @@
         </p:nvSpPr>
         <p:spPr>
           <a:xfrm>
-            <a:off x="7936992" y="3378708"/>
+            <a:off x="7936992" y="3342132"/>
             <a:ext cx="3694176" cy="256032"/>
           </a:xfrm>
           <a:prstGeom prst="rect">
@@ -8375,7 +8451,7 @@
                 </a:solidFill>
                 <a:latin typeface="PingFang SC"/>
               </a:rPr>
-              <a:t>requestBody(...)</a:t>
+              <a:t>freemarker:</a:t>
             </a:r>
           </a:p>
         </p:txBody>
@@ -8388,8 +8464,8 @@
         </p:nvSpPr>
         <p:spPr>
           <a:xfrm>
-            <a:off x="7936992" y="3634739"/>
-            <a:ext cx="3694176" cy="256032"/>
+            <a:off x="7936992" y="3598163"/>
+            <a:ext cx="3694176" cy="512064"/>
           </a:xfrm>
           <a:prstGeom prst="rect">
             <a:avLst/>
@@ -8417,7 +8493,7 @@
                 </a:solidFill>
                 <a:latin typeface="PingFang SC"/>
               </a:rPr>
-              <a:t>InOut：等待并返回结果</a:t>
+              <a:t>渲染结果成为新 Body，路径是 classpath 资源</a:t>
             </a:r>
           </a:p>
         </p:txBody>
@@ -8430,7 +8506,7 @@
         </p:nvSpPr>
         <p:spPr>
           <a:xfrm>
-            <a:off x="7699248" y="4105656"/>
+            <a:off x="7699248" y="4247388"/>
             <a:ext cx="91440" cy="91440"/>
           </a:xfrm>
           <a:prstGeom prst="ellipse">
@@ -8474,7 +8550,7 @@
         </p:nvSpPr>
         <p:spPr>
           <a:xfrm>
-            <a:off x="7936992" y="4032504"/>
+            <a:off x="7936992" y="4174235"/>
             <a:ext cx="3694176" cy="256032"/>
           </a:xfrm>
           <a:prstGeom prst="rect">
@@ -8503,7 +8579,7 @@
                 </a:solidFill>
                 <a:latin typeface="PingFang SC"/>
               </a:rPr>
-              <a:t>Bean 从哪来</a:t>
+              <a:t>防腐层</a:t>
             </a:r>
           </a:p>
         </p:txBody>
@@ -8516,8 +8592,8 @@
         </p:nvSpPr>
         <p:spPr>
           <a:xfrm>
-            <a:off x="7936992" y="4288536"/>
-            <a:ext cx="3694176" cy="512064"/>
+            <a:off x="7936992" y="4430268"/>
+            <a:ext cx="3694176" cy="256032"/>
           </a:xfrm>
           <a:prstGeom prst="rect">
             <a:avLst/>
@@ -8545,7 +8621,7 @@
                 </a:solidFill>
                 <a:latin typeface="PingFang SC"/>
               </a:rPr>
-              <a:t>&lt;camelContext&gt; 自动注册了名为 template 的 Bean</a:t>
+              <a:t>外部格式只写在两个 .ftl 里，不碰 Java</a:t>
             </a:r>
           </a:p>
         </p:txBody>
@@ -8558,7 +8634,7 @@
         </p:nvSpPr>
         <p:spPr>
           <a:xfrm>
-            <a:off x="7699248" y="4956048"/>
+            <a:off x="7699248" y="4882895"/>
             <a:ext cx="91440" cy="91440"/>
           </a:xfrm>
           <a:prstGeom prst="ellipse">
@@ -8602,7 +8678,7 @@
         </p:nvSpPr>
         <p:spPr>
           <a:xfrm>
-            <a:off x="7936992" y="4882896"/>
+            <a:off x="7936992" y="4809743"/>
             <a:ext cx="3694176" cy="256032"/>
           </a:xfrm>
           <a:prstGeom prst="rect">
@@ -8631,7 +8707,7 @@
                 </a:solidFill>
                 <a:latin typeface="PingFang SC"/>
               </a:rPr>
-              <a:t>必须单例</a:t>
+              <a:t>template Bean</a:t>
             </a:r>
           </a:p>
         </p:txBody>
@@ -8644,8 +8720,8 @@
         </p:nvSpPr>
         <p:spPr>
           <a:xfrm>
-            <a:off x="7936992" y="5138928"/>
-            <a:ext cx="3694176" cy="512064"/>
+            <a:off x="7936992" y="5065775"/>
+            <a:ext cx="3694176" cy="256032"/>
           </a:xfrm>
           <a:prstGeom prst="rect">
             <a:avLst/>
@@ -8673,7 +8749,7 @@
                 </a:solidFill>
                 <a:latin typeface="PingFang SC"/>
               </a:rPr>
-              <a:t>内部有 Endpoint 缓存与线程池，切忌每次 new</a:t>
+              <a:t>&lt;camelContext&gt; 已注册，必须单例复用</a:t>
             </a:r>
           </a:p>
         </p:txBody>
@@ -8686,8 +8762,8 @@
         </p:nvSpPr>
         <p:spPr>
           <a:xfrm>
-            <a:off x="658368" y="5230368"/>
-            <a:ext cx="10881360" cy="905256"/>
+            <a:off x="658368" y="5504688"/>
+            <a:ext cx="10881360" cy="694944"/>
           </a:xfrm>
           <a:prstGeom prst="roundRect">
             <a:avLst>
@@ -8734,8 +8810,8 @@
         </p:nvSpPr>
         <p:spPr>
           <a:xfrm>
-            <a:off x="658368" y="5230368"/>
-            <a:ext cx="50292" cy="905256"/>
+            <a:off x="658368" y="5504688"/>
+            <a:ext cx="50292" cy="694944"/>
           </a:xfrm>
           <a:prstGeom prst="rect">
             <a:avLst/>
@@ -8778,7 +8854,7 @@
         </p:nvSpPr>
         <p:spPr>
           <a:xfrm>
-            <a:off x="841247" y="5349240"/>
+            <a:off x="841247" y="5623559"/>
             <a:ext cx="685800" cy="219456"/>
           </a:xfrm>
           <a:prstGeom prst="rect">
@@ -8807,7 +8883,7 @@
                 </a:solidFill>
                 <a:latin typeface="PingFang SC"/>
               </a:rPr>
-              <a:t>对照</a:t>
+              <a:t>写法</a:t>
             </a:r>
           </a:p>
         </p:txBody>
@@ -8820,8 +8896,8 @@
         </p:nvSpPr>
         <p:spPr>
           <a:xfrm>
-            <a:off x="1527048" y="5349240"/>
-            <a:ext cx="9829800" cy="722376"/>
+            <a:off x="1527048" y="5623559"/>
+            <a:ext cx="9829800" cy="512064"/>
           </a:xfrm>
           <a:prstGeom prst="rect">
             <a:avLst/>
@@ -8849,7 +8925,7 @@
                 </a:solidFill>
                 <a:latin typeface="PingFang SC"/>
               </a:rPr>
-              <a:t>路由里用 &lt;to&gt; 发消息，Java 代码里用 ProducerTemplate 发消息 —— 两者走的是同一套 Component/Endpoint 机制。路由里想调 Spring Bean 则写 &lt;to uri="bean:xxx?method=yyy"/&gt;。</a:t>
+              <a:t>模板里可用 body / headers / exchange 三个变量。出站模板的输入是内部订单 Map，入站模板的输入是解析后的外部应答 Map —— 所以 HTTP 文本要先 parse 一次再喂给模板。</a:t>
             </a:r>
           </a:p>
         </p:txBody>
@@ -8891,7 +8967,7 @@
                 </a:solidFill>
                 <a:latin typeface="PingFang SC"/>
               </a:rPr>
-              <a:t>注入时记得加 @Lazy，否则会触发循环依赖</a:t>
+              <a:t>两个模板在 src/main/resources/templates/ 下</a:t>
             </a:r>
           </a:p>
         </p:txBody>
